--- a/slides/llcore_findings_2026_ja.pptx
+++ b/slides/llcore_findings_2026_ja.pptx
@@ -3379,7 +3379,11 @@
           </a:bodyPr>
           <a:lstStyle/>
           <a:p>
-            <a:pPr algn="l"/>
+            <a:pPr algn="l">
+              <a:spcAft>
+                <a:spcPts val="1400"/>
+              </a:spcAft>
+            </a:pPr>
             <a:r>
               <a:rPr sz="1900" b="0">
                 <a:solidFill>
@@ -3391,7 +3395,11 @@
             </a:r>
           </a:p>
           <a:p>
-            <a:pPr algn="l"/>
+            <a:pPr algn="l">
+              <a:spcAft>
+                <a:spcPts val="1400"/>
+              </a:spcAft>
+            </a:pPr>
             <a:r>
               <a:rPr sz="1900" b="0">
                 <a:solidFill>
@@ -3403,7 +3411,11 @@
             </a:r>
           </a:p>
           <a:p>
-            <a:pPr algn="l"/>
+            <a:pPr algn="l">
+              <a:spcAft>
+                <a:spcPts val="1400"/>
+              </a:spcAft>
+            </a:pPr>
             <a:r>
               <a:rPr sz="1900" b="0">
                 <a:solidFill>
@@ -3415,7 +3427,11 @@
             </a:r>
           </a:p>
           <a:p>
-            <a:pPr algn="l"/>
+            <a:pPr algn="l">
+              <a:spcAft>
+                <a:spcPts val="1400"/>
+              </a:spcAft>
+            </a:pPr>
             <a:r>
               <a:rPr sz="1900" b="0">
                 <a:solidFill>
@@ -3427,7 +3443,11 @@
             </a:r>
           </a:p>
           <a:p>
-            <a:pPr algn="l"/>
+            <a:pPr algn="l">
+              <a:spcAft>
+                <a:spcPts val="1400"/>
+              </a:spcAft>
+            </a:pPr>
             <a:r>
               <a:rPr sz="1900" b="0">
                 <a:solidFill>
@@ -3593,7 +3613,11 @@
           </a:bodyPr>
           <a:lstStyle/>
           <a:p>
-            <a:pPr algn="l"/>
+            <a:pPr algn="l">
+              <a:spcAft>
+                <a:spcPts val="1400"/>
+              </a:spcAft>
+            </a:pPr>
             <a:r>
               <a:rPr sz="1900" b="0">
                 <a:solidFill>
@@ -3605,7 +3629,11 @@
             </a:r>
           </a:p>
           <a:p>
-            <a:pPr algn="l"/>
+            <a:pPr algn="l">
+              <a:spcAft>
+                <a:spcPts val="1400"/>
+              </a:spcAft>
+            </a:pPr>
             <a:r>
               <a:rPr sz="1900" b="0">
                 <a:solidFill>
@@ -3617,7 +3645,11 @@
             </a:r>
           </a:p>
           <a:p>
-            <a:pPr algn="l"/>
+            <a:pPr algn="l">
+              <a:spcAft>
+                <a:spcPts val="1400"/>
+              </a:spcAft>
+            </a:pPr>
             <a:r>
               <a:rPr sz="1900" b="0">
                 <a:solidFill>
@@ -3629,7 +3661,11 @@
             </a:r>
           </a:p>
           <a:p>
-            <a:pPr algn="l"/>
+            <a:pPr algn="l">
+              <a:spcAft>
+                <a:spcPts val="1400"/>
+              </a:spcAft>
+            </a:pPr>
             <a:r>
               <a:rPr sz="1900" b="0">
                 <a:solidFill>
@@ -3795,7 +3831,11 @@
           </a:bodyPr>
           <a:lstStyle/>
           <a:p>
-            <a:pPr algn="l"/>
+            <a:pPr algn="l">
+              <a:spcAft>
+                <a:spcPts val="1400"/>
+              </a:spcAft>
+            </a:pPr>
             <a:r>
               <a:rPr sz="1900" b="0">
                 <a:solidFill>
@@ -3807,7 +3847,11 @@
             </a:r>
           </a:p>
           <a:p>
-            <a:pPr algn="l"/>
+            <a:pPr algn="l">
+              <a:spcAft>
+                <a:spcPts val="1400"/>
+              </a:spcAft>
+            </a:pPr>
             <a:r>
               <a:rPr sz="1900" b="0">
                 <a:solidFill>
@@ -3819,7 +3863,11 @@
             </a:r>
           </a:p>
           <a:p>
-            <a:pPr algn="l"/>
+            <a:pPr algn="l">
+              <a:spcAft>
+                <a:spcPts val="1400"/>
+              </a:spcAft>
+            </a:pPr>
             <a:r>
               <a:rPr sz="1900" b="0">
                 <a:solidFill>
@@ -3831,7 +3879,11 @@
             </a:r>
           </a:p>
           <a:p>
-            <a:pPr algn="l"/>
+            <a:pPr algn="l">
+              <a:spcAft>
+                <a:spcPts val="1400"/>
+              </a:spcAft>
+            </a:pPr>
             <a:r>
               <a:rPr sz="1900" b="0">
                 <a:solidFill>
@@ -4032,7 +4084,11 @@
           </a:bodyPr>
           <a:lstStyle/>
           <a:p>
-            <a:pPr algn="l"/>
+            <a:pPr algn="l">
+              <a:spcAft>
+                <a:spcPts val="1400"/>
+              </a:spcAft>
+            </a:pPr>
             <a:r>
               <a:rPr sz="1900" b="0">
                 <a:solidFill>
@@ -4044,7 +4100,11 @@
             </a:r>
           </a:p>
           <a:p>
-            <a:pPr algn="l"/>
+            <a:pPr algn="l">
+              <a:spcAft>
+                <a:spcPts val="1400"/>
+              </a:spcAft>
+            </a:pPr>
             <a:r>
               <a:rPr sz="1900" b="0">
                 <a:solidFill>
@@ -4056,7 +4116,11 @@
             </a:r>
           </a:p>
           <a:p>
-            <a:pPr algn="l"/>
+            <a:pPr algn="l">
+              <a:spcAft>
+                <a:spcPts val="1400"/>
+              </a:spcAft>
+            </a:pPr>
             <a:r>
               <a:rPr sz="1900" b="0">
                 <a:solidFill>
@@ -4068,7 +4132,11 @@
             </a:r>
           </a:p>
           <a:p>
-            <a:pPr algn="l"/>
+            <a:pPr algn="l">
+              <a:spcAft>
+                <a:spcPts val="1400"/>
+              </a:spcAft>
+            </a:pPr>
             <a:r>
               <a:rPr sz="1900" b="0">
                 <a:solidFill>
@@ -4080,7 +4148,11 @@
             </a:r>
           </a:p>
           <a:p>
-            <a:pPr algn="l"/>
+            <a:pPr algn="l">
+              <a:spcAft>
+                <a:spcPts val="1400"/>
+              </a:spcAft>
+            </a:pPr>
             <a:r>
               <a:rPr sz="1900" b="0">
                 <a:solidFill>
@@ -4246,7 +4318,11 @@
           </a:bodyPr>
           <a:lstStyle/>
           <a:p>
-            <a:pPr algn="l"/>
+            <a:pPr algn="l">
+              <a:spcAft>
+                <a:spcPts val="1400"/>
+              </a:spcAft>
+            </a:pPr>
             <a:r>
               <a:rPr sz="1900" b="0">
                 <a:solidFill>
@@ -4258,7 +4334,11 @@
             </a:r>
           </a:p>
           <a:p>
-            <a:pPr lvl="1" algn="l"/>
+            <a:pPr lvl="1" algn="l">
+              <a:spcAft>
+                <a:spcPts val="1400"/>
+              </a:spcAft>
+            </a:pPr>
             <a:r>
               <a:rPr sz="1900" b="0">
                 <a:solidFill>
@@ -4270,7 +4350,11 @@
             </a:r>
           </a:p>
           <a:p>
-            <a:pPr algn="l"/>
+            <a:pPr algn="l">
+              <a:spcAft>
+                <a:spcPts val="1400"/>
+              </a:spcAft>
+            </a:pPr>
             <a:r>
               <a:rPr sz="1900" b="0">
                 <a:solidFill>
@@ -4282,7 +4366,11 @@
             </a:r>
           </a:p>
           <a:p>
-            <a:pPr algn="l"/>
+            <a:pPr algn="l">
+              <a:spcAft>
+                <a:spcPts val="1400"/>
+              </a:spcAft>
+            </a:pPr>
             <a:r>
               <a:rPr sz="1900" b="0">
                 <a:solidFill>
@@ -4294,7 +4382,11 @@
             </a:r>
           </a:p>
           <a:p>
-            <a:pPr algn="l"/>
+            <a:pPr algn="l">
+              <a:spcAft>
+                <a:spcPts val="1400"/>
+              </a:spcAft>
+            </a:pPr>
             <a:r>
               <a:rPr sz="1900" b="0">
                 <a:solidFill>
@@ -4495,7 +4587,11 @@
           </a:bodyPr>
           <a:lstStyle/>
           <a:p>
-            <a:pPr algn="l"/>
+            <a:pPr algn="l">
+              <a:spcAft>
+                <a:spcPts val="1400"/>
+              </a:spcAft>
+            </a:pPr>
             <a:r>
               <a:rPr sz="1900" b="0">
                 <a:solidFill>
@@ -4507,7 +4603,11 @@
             </a:r>
           </a:p>
           <a:p>
-            <a:pPr algn="l"/>
+            <a:pPr algn="l">
+              <a:spcAft>
+                <a:spcPts val="1400"/>
+              </a:spcAft>
+            </a:pPr>
             <a:r>
               <a:rPr sz="1900" b="0">
                 <a:solidFill>
@@ -4519,7 +4619,11 @@
             </a:r>
           </a:p>
           <a:p>
-            <a:pPr lvl="1" algn="l"/>
+            <a:pPr lvl="1" algn="l">
+              <a:spcAft>
+                <a:spcPts val="1400"/>
+              </a:spcAft>
+            </a:pPr>
             <a:r>
               <a:rPr sz="1900" b="0">
                 <a:solidFill>
@@ -4531,7 +4635,11 @@
             </a:r>
           </a:p>
           <a:p>
-            <a:pPr algn="l"/>
+            <a:pPr algn="l">
+              <a:spcAft>
+                <a:spcPts val="1400"/>
+              </a:spcAft>
+            </a:pPr>
             <a:r>
               <a:rPr sz="1900" b="0">
                 <a:solidFill>
@@ -4697,7 +4805,11 @@
           </a:bodyPr>
           <a:lstStyle/>
           <a:p>
-            <a:pPr algn="l"/>
+            <a:pPr algn="l">
+              <a:spcAft>
+                <a:spcPts val="1400"/>
+              </a:spcAft>
+            </a:pPr>
             <a:r>
               <a:rPr sz="1900" b="0">
                 <a:solidFill>
@@ -4709,7 +4821,11 @@
             </a:r>
           </a:p>
           <a:p>
-            <a:pPr lvl="1" algn="l"/>
+            <a:pPr lvl="1" algn="l">
+              <a:spcAft>
+                <a:spcPts val="1400"/>
+              </a:spcAft>
+            </a:pPr>
             <a:r>
               <a:rPr sz="1900" b="0">
                 <a:solidFill>
@@ -4721,7 +4837,11 @@
             </a:r>
           </a:p>
           <a:p>
-            <a:pPr lvl="1" algn="l"/>
+            <a:pPr lvl="1" algn="l">
+              <a:spcAft>
+                <a:spcPts val="1400"/>
+              </a:spcAft>
+            </a:pPr>
             <a:r>
               <a:rPr sz="1900" b="0">
                 <a:solidFill>
@@ -4733,7 +4853,11 @@
             </a:r>
           </a:p>
           <a:p>
-            <a:pPr algn="l"/>
+            <a:pPr algn="l">
+              <a:spcAft>
+                <a:spcPts val="1400"/>
+              </a:spcAft>
+            </a:pPr>
             <a:r>
               <a:rPr sz="1900" b="0">
                 <a:solidFill>
@@ -4745,7 +4869,11 @@
             </a:r>
           </a:p>
           <a:p>
-            <a:pPr algn="l"/>
+            <a:pPr algn="l">
+              <a:spcAft>
+                <a:spcPts val="1400"/>
+              </a:spcAft>
+            </a:pPr>
             <a:r>
               <a:rPr sz="1900" b="0">
                 <a:solidFill>
@@ -4911,7 +5039,11 @@
           </a:bodyPr>
           <a:lstStyle/>
           <a:p>
-            <a:pPr algn="l"/>
+            <a:pPr algn="l">
+              <a:spcAft>
+                <a:spcPts val="1400"/>
+              </a:spcAft>
+            </a:pPr>
             <a:r>
               <a:rPr sz="1900" b="0">
                 <a:solidFill>
@@ -4923,7 +5055,11 @@
             </a:r>
           </a:p>
           <a:p>
-            <a:pPr algn="l"/>
+            <a:pPr algn="l">
+              <a:spcAft>
+                <a:spcPts val="1400"/>
+              </a:spcAft>
+            </a:pPr>
             <a:r>
               <a:rPr sz="1900" b="0">
                 <a:solidFill>
@@ -4935,7 +5071,11 @@
             </a:r>
           </a:p>
           <a:p>
-            <a:pPr algn="l"/>
+            <a:pPr algn="l">
+              <a:spcAft>
+                <a:spcPts val="1400"/>
+              </a:spcAft>
+            </a:pPr>
             <a:r>
               <a:rPr sz="1900" b="0">
                 <a:solidFill>
@@ -4947,7 +5087,11 @@
             </a:r>
           </a:p>
           <a:p>
-            <a:pPr algn="l"/>
+            <a:pPr algn="l">
+              <a:spcAft>
+                <a:spcPts val="1400"/>
+              </a:spcAft>
+            </a:pPr>
             <a:r>
               <a:rPr sz="1900" b="0">
                 <a:solidFill>
@@ -5148,7 +5292,11 @@
           </a:bodyPr>
           <a:lstStyle/>
           <a:p>
-            <a:pPr algn="l"/>
+            <a:pPr algn="l">
+              <a:spcAft>
+                <a:spcPts val="1400"/>
+              </a:spcAft>
+            </a:pPr>
             <a:r>
               <a:rPr sz="1900" b="0">
                 <a:solidFill>
@@ -5160,7 +5308,11 @@
             </a:r>
           </a:p>
           <a:p>
-            <a:pPr algn="l"/>
+            <a:pPr algn="l">
+              <a:spcAft>
+                <a:spcPts val="1400"/>
+              </a:spcAft>
+            </a:pPr>
             <a:r>
               <a:rPr sz="1900" b="0">
                 <a:solidFill>
@@ -5172,7 +5324,11 @@
             </a:r>
           </a:p>
           <a:p>
-            <a:pPr algn="l"/>
+            <a:pPr algn="l">
+              <a:spcAft>
+                <a:spcPts val="1400"/>
+              </a:spcAft>
+            </a:pPr>
             <a:r>
               <a:rPr sz="1900" b="0">
                 <a:solidFill>
@@ -5184,7 +5340,11 @@
             </a:r>
           </a:p>
           <a:p>
-            <a:pPr algn="l"/>
+            <a:pPr algn="l">
+              <a:spcAft>
+                <a:spcPts val="1400"/>
+              </a:spcAft>
+            </a:pPr>
             <a:r>
               <a:rPr sz="1900" b="0">
                 <a:solidFill>
